--- a/frontend/public/RescueAI_Innovative_Pitch_Deck.pptx
+++ b/frontend/public/RescueAI_Innovative_Pitch_Deck.pptx
@@ -14,7 +14,6 @@
     <p:sldId id="262" r:id="rId13"/>
     <p:sldId id="263" r:id="rId14"/>
     <p:sldId id="264" r:id="rId15"/>
-    <p:sldId id="265" r:id="rId16"/>
   </p:sldIdLst>
   <p:sldSz cx="12191695" cy="6858000" type="screen4x3"/>
   <p:notesSz cx="6858000" cy="9144000"/>
@@ -3213,7 +3212,7 @@
               </a:defRPr>
             </a:pPr>
             <a:r>
-              <a:t>IEEE HACK GENESIS 2026 • OFFICIAL PITCH DECK</a:t>
+              <a:t>PROJECT IDEA &amp; CORE VISION</a:t>
             </a:r>
           </a:p>
         </p:txBody>
@@ -3248,7 +3247,7 @@
               </a:defRPr>
             </a:pPr>
             <a:r>
-              <a:t>RescueAI: Autonomous Disaster Response</a:t>
+              <a:t>RescueAI: Autonomous Disaster Response Engine</a:t>
             </a:r>
           </a:p>
           <a:p>
@@ -3260,7 +3259,7 @@
               </a:defRPr>
             </a:pPr>
             <a:r>
-              <a:t>Offline-First AI Triage, 99.99% GPS Telemetry &amp; Vanishing Rescue Workflows</a:t>
+              <a:t>AI-Powered Civilian Survival &amp; NDRF Emergency Coordination Ecosystem</a:t>
             </a:r>
           </a:p>
         </p:txBody>
@@ -3343,7 +3342,7 @@
               </a:defRPr>
             </a:pPr>
             <a:r>
-              <a:t>⚡ Core Innovation Highlights</a:t>
+              <a:t>💡 Core Project Idea</a:t>
             </a:r>
           </a:p>
           <a:p>
@@ -3358,7 +3357,7 @@
               </a:defRPr>
             </a:pPr>
             <a:r>
-              <a:t>• Sub-5ms Stale-While-Revalidate PWA &amp; Mobile App Engine</a:t>
+              <a:t>• High-Impact Purpose: Eliminating civilian casualties and dispatch delays during natural disasters.</a:t>
             </a:r>
           </a:p>
           <a:p>
@@ -3373,7 +3372,7 @@
               </a:defRPr>
             </a:pPr>
             <a:r>
-              <a:t>• 99.99% Location Precision Lock with Direct Google Maps URLs</a:t>
+              <a:t>• Civilian Survival Suite: 1-Click Radar SOS, Hands-Free Voice Assistant SOS &amp; Offline Survival AI.</a:t>
             </a:r>
           </a:p>
           <a:p>
@@ -3388,7 +3387,7 @@
               </a:defRPr>
             </a:pPr>
             <a:r>
-              <a:t>• Hands-Free Google Assistant Voice SOS &amp; 4-Color Wave Calling</a:t>
+              <a:t>• Rescue Command Suite: Real-Time Telemetry Grid, 1-Click Vanishing Workflows &amp; Fleet Triage.</a:t>
             </a:r>
           </a:p>
           <a:p>
@@ -3403,22 +3402,7 @@
               </a:defRPr>
             </a:pPr>
             <a:r>
-              <a:t>• 1-Click Vanishing Resolution Buttons (Accept ➔ Reached ➔ Resolve)</a:t>
-            </a:r>
-          </a:p>
-          <a:p>
-            <a:pPr>
-              <a:spcAft>
-                <a:spcPts val="1000"/>
-              </a:spcAft>
-              <a:defRPr sz="1300">
-                <a:solidFill>
-                  <a:srgbClr val="FFFFFF"/>
-                </a:solidFill>
-              </a:defRPr>
-            </a:pPr>
-            <a:r>
-              <a:t>• 100% Offline Emergency AI Survival Bot (Zero Internet Required)</a:t>
+              <a:t>• Multi-Platform Mobility: Web PWA (&lt;5ms load) &amp; Native Android App (Google Android Studio).</a:t>
             </a:r>
           </a:p>
         </p:txBody>
@@ -3501,7 +3485,7 @@
               </a:defRPr>
             </a:pPr>
             <a:r>
-              <a:t>🌐 Platform Deployment Links</a:t>
+              <a:t>🌟 Key Value Proposition</a:t>
             </a:r>
           </a:p>
           <a:p>
@@ -3516,7 +3500,7 @@
               </a:defRPr>
             </a:pPr>
             <a:r>
-              <a:t>• Live Web App: https://rescueai-ai.vercel.app</a:t>
+              <a:t>• 100% Offline-First AI: Operates without internet during cellular network blackouts.</a:t>
             </a:r>
           </a:p>
           <a:p>
@@ -3531,7 +3515,7 @@
               </a:defRPr>
             </a:pPr>
             <a:r>
-              <a:t>• App Download Center: /download (Android APK)</a:t>
+              <a:t>• 99.99% GPS Precision Lock: Pinpoint victim location (±2.5m) with direct Google Maps URLs.</a:t>
             </a:r>
           </a:p>
           <a:p>
@@ -3546,7 +3530,7 @@
               </a:defRPr>
             </a:pPr>
             <a:r>
-              <a:t>• Super Admin Console: /admin (National Alerts)</a:t>
+              <a:t>• Zero-Clutter Operator UX: Single-button progressive workflows (Accept -&gt; Reached -&gt; Resolve).</a:t>
             </a:r>
           </a:p>
           <a:p>
@@ -3561,494 +3545,7 @@
               </a:defRPr>
             </a:pPr>
             <a:r>
-              <a:t>• Rescue Command Grid: /rescue-dashboard</a:t>
-            </a:r>
-          </a:p>
-          <a:p>
-            <a:pPr>
-              <a:spcAft>
-                <a:spcPts val="1000"/>
-              </a:spcAft>
-              <a:defRPr sz="1300">
-                <a:solidFill>
-                  <a:srgbClr val="FFFFFF"/>
-                </a:solidFill>
-              </a:defRPr>
-            </a:pPr>
-            <a:r>
-              <a:t>• Status: 100% Verified Production Ready (0 Errors)</a:t>
-            </a:r>
-          </a:p>
-        </p:txBody>
-      </p:sp>
-    </p:spTree>
-  </p:cSld>
-  <p:clrMapOvr>
-    <a:masterClrMapping/>
-  </p:clrMapOvr>
-</p:sld>
-</file>
-
-<file path=ppt/slides/slide10.xml><?xml version="1.0" encoding="utf-8"?>
-<p:sld xmlns:a="http://schemas.openxmlformats.org/drawingml/2006/main" xmlns:p="http://schemas.openxmlformats.org/presentationml/2006/main" xmlns:r="http://schemas.openxmlformats.org/officeDocument/2006/relationships">
-  <p:cSld>
-    <p:spTree>
-      <p:nvGrpSpPr>
-        <p:cNvPr id="1" name=""/>
-        <p:cNvGrpSpPr/>
-        <p:nvPr/>
-      </p:nvGrpSpPr>
-      <p:grpSpPr/>
-      <p:sp>
-        <p:nvSpPr>
-          <p:cNvPr id="2" name="Rectangle 1"/>
-          <p:cNvSpPr/>
-          <p:nvPr/>
-        </p:nvSpPr>
-        <p:spPr>
-          <a:xfrm>
-            <a:off x="0" y="0"/>
-            <a:ext cx="12191695" cy="6858000"/>
-          </a:xfrm>
-          <a:prstGeom prst="rect">
-            <a:avLst/>
-          </a:prstGeom>
-          <a:solidFill>
-            <a:srgbClr val="0F172A"/>
-          </a:solidFill>
-          <a:ln>
-            <a:noFill/>
-          </a:ln>
-        </p:spPr>
-        <p:style>
-          <a:lnRef idx="1">
-            <a:schemeClr val="accent1"/>
-          </a:lnRef>
-          <a:fillRef idx="3">
-            <a:schemeClr val="accent1"/>
-          </a:fillRef>
-          <a:effectRef idx="2">
-            <a:schemeClr val="accent1"/>
-          </a:effectRef>
-          <a:fontRef idx="minor">
-            <a:schemeClr val="lt1"/>
-          </a:fontRef>
-        </p:style>
-        <p:txBody>
-          <a:bodyPr rtlCol="0" anchor="ctr"/>
-          <a:lstStyle/>
-          <a:p>
-            <a:pPr algn="ctr"/>
-          </a:p>
-        </p:txBody>
-      </p:sp>
-      <p:sp>
-        <p:nvSpPr>
-          <p:cNvPr id="3" name="Rectangle 2"/>
-          <p:cNvSpPr/>
-          <p:nvPr/>
-        </p:nvSpPr>
-        <p:spPr>
-          <a:xfrm>
-            <a:off x="731520" y="457200"/>
-            <a:ext cx="10728655" cy="54864"/>
-          </a:xfrm>
-          <a:prstGeom prst="rect">
-            <a:avLst/>
-          </a:prstGeom>
-          <a:solidFill>
-            <a:srgbClr val="DC2626"/>
-          </a:solidFill>
-          <a:ln>
-            <a:noFill/>
-          </a:ln>
-        </p:spPr>
-        <p:style>
-          <a:lnRef idx="1">
-            <a:schemeClr val="accent1"/>
-          </a:lnRef>
-          <a:fillRef idx="3">
-            <a:schemeClr val="accent1"/>
-          </a:fillRef>
-          <a:effectRef idx="2">
-            <a:schemeClr val="accent1"/>
-          </a:effectRef>
-          <a:fontRef idx="minor">
-            <a:schemeClr val="lt1"/>
-          </a:fontRef>
-        </p:style>
-        <p:txBody>
-          <a:bodyPr rtlCol="0" anchor="ctr"/>
-          <a:lstStyle/>
-          <a:p>
-            <a:pPr algn="ctr"/>
-          </a:p>
-        </p:txBody>
-      </p:sp>
-      <p:sp>
-        <p:nvSpPr>
-          <p:cNvPr id="4" name="TextBox 3"/>
-          <p:cNvSpPr txBox="1"/>
-          <p:nvPr/>
-        </p:nvSpPr>
-        <p:spPr>
-          <a:xfrm>
-            <a:off x="731520" y="594360"/>
-            <a:ext cx="7315200" cy="365760"/>
-          </a:xfrm>
-          <a:prstGeom prst="rect">
-            <a:avLst/>
-          </a:prstGeom>
-          <a:noFill/>
-        </p:spPr>
-        <p:txBody>
-          <a:bodyPr wrap="none">
-            <a:spAutoFit/>
-          </a:bodyPr>
-          <a:lstStyle/>
-          <a:p>
-            <a:pPr>
-              <a:defRPr sz="1100" b="1">
-                <a:solidFill>
-                  <a:srgbClr val="DC2626"/>
-                </a:solidFill>
-              </a:defRPr>
-            </a:pPr>
-            <a:r>
-              <a:t>HACKATHON MILESTONES &amp; FUTURE ROADMAP</a:t>
-            </a:r>
-          </a:p>
-        </p:txBody>
-      </p:sp>
-      <p:sp>
-        <p:nvSpPr>
-          <p:cNvPr id="5" name="TextBox 4"/>
-          <p:cNvSpPr txBox="1"/>
-          <p:nvPr/>
-        </p:nvSpPr>
-        <p:spPr>
-          <a:xfrm>
-            <a:off x="731520" y="914400"/>
-            <a:ext cx="10728655" cy="914400"/>
-          </a:xfrm>
-          <a:prstGeom prst="rect">
-            <a:avLst/>
-          </a:prstGeom>
-          <a:noFill/>
-        </p:spPr>
-        <p:txBody>
-          <a:bodyPr wrap="square">
-            <a:spAutoFit/>
-          </a:bodyPr>
-          <a:lstStyle/>
-          <a:p>
-            <a:pPr>
-              <a:defRPr sz="2800" b="1">
-                <a:solidFill>
-                  <a:srgbClr val="FFFFFF"/>
-                </a:solidFill>
-              </a:defRPr>
-            </a:pPr>
-            <a:r>
-              <a:t>100% Production Verified Platform</a:t>
-            </a:r>
-          </a:p>
-          <a:p>
-            <a:pPr>
-              <a:defRPr sz="1400">
-                <a:solidFill>
-                  <a:srgbClr val="94A3B8"/>
-                </a:solidFill>
-              </a:defRPr>
-            </a:pPr>
-            <a:r>
-              <a:t>IEEE Hack Genesis 2026 Presentation Conclusion</a:t>
-            </a:r>
-          </a:p>
-        </p:txBody>
-      </p:sp>
-      <p:sp>
-        <p:nvSpPr>
-          <p:cNvPr id="6" name="Rounded Rectangle 5"/>
-          <p:cNvSpPr/>
-          <p:nvPr/>
-        </p:nvSpPr>
-        <p:spPr>
-          <a:xfrm>
-            <a:off x="731520" y="2011680"/>
-            <a:ext cx="5166360" cy="4297680"/>
-          </a:xfrm>
-          <a:prstGeom prst="roundRect">
-            <a:avLst/>
-          </a:prstGeom>
-          <a:solidFill>
-            <a:srgbClr val="1E293B"/>
-          </a:solidFill>
-          <a:ln>
-            <a:solidFill>
-              <a:srgbClr val="334155"/>
-            </a:solidFill>
-          </a:ln>
-        </p:spPr>
-        <p:style>
-          <a:lnRef idx="1">
-            <a:schemeClr val="accent1"/>
-          </a:lnRef>
-          <a:fillRef idx="3">
-            <a:schemeClr val="accent1"/>
-          </a:fillRef>
-          <a:effectRef idx="2">
-            <a:schemeClr val="accent1"/>
-          </a:effectRef>
-          <a:fontRef idx="minor">
-            <a:schemeClr val="lt1"/>
-          </a:fontRef>
-        </p:style>
-        <p:txBody>
-          <a:bodyPr rtlCol="0" anchor="ctr"/>
-          <a:lstStyle/>
-          <a:p>
-            <a:pPr algn="ctr"/>
-          </a:p>
-        </p:txBody>
-      </p:sp>
-      <p:sp>
-        <p:nvSpPr>
-          <p:cNvPr id="7" name="TextBox 6"/>
-          <p:cNvSpPr txBox="1"/>
-          <p:nvPr/>
-        </p:nvSpPr>
-        <p:spPr>
-          <a:xfrm>
-            <a:off x="914400" y="2194560"/>
-            <a:ext cx="4800600" cy="3931920"/>
-          </a:xfrm>
-          <a:prstGeom prst="rect">
-            <a:avLst/>
-          </a:prstGeom>
-          <a:noFill/>
-        </p:spPr>
-        <p:txBody>
-          <a:bodyPr wrap="square">
-            <a:spAutoFit/>
-          </a:bodyPr>
-          <a:lstStyle/>
-          <a:p>
-            <a:pPr>
-              <a:spcAft>
-                <a:spcPts val="1400"/>
-              </a:spcAft>
-              <a:defRPr sz="1800" b="1">
-                <a:solidFill>
-                  <a:srgbClr val="DC2626"/>
-                </a:solidFill>
-              </a:defRPr>
-            </a:pPr>
-            <a:r>
-              <a:t>🏆 Hackathon Milestones Achieved</a:t>
-            </a:r>
-          </a:p>
-          <a:p>
-            <a:pPr>
-              <a:spcAft>
-                <a:spcPts val="1000"/>
-              </a:spcAft>
-              <a:defRPr sz="1300">
-                <a:solidFill>
-                  <a:srgbClr val="FFFFFF"/>
-                </a:solidFill>
-              </a:defRPr>
-            </a:pPr>
-            <a:r>
-              <a:t>• 100% Clean Production Build with 0 Errors &amp; 0 Warnings.</a:t>
-            </a:r>
-          </a:p>
-          <a:p>
-            <a:pPr>
-              <a:spcAft>
-                <a:spcPts val="1000"/>
-              </a:spcAft>
-              <a:defRPr sz="1300">
-                <a:solidFill>
-                  <a:srgbClr val="FFFFFF"/>
-                </a:solidFill>
-              </a:defRPr>
-            </a:pPr>
-            <a:r>
-              <a:t>• Live Deployed Web App: https://rescueai-ai.vercel.app</a:t>
-            </a:r>
-          </a:p>
-          <a:p>
-            <a:pPr>
-              <a:spcAft>
-                <a:spcPts val="1000"/>
-              </a:spcAft>
-              <a:defRPr sz="1300">
-                <a:solidFill>
-                  <a:srgbClr val="FFFFFF"/>
-                </a:solidFill>
-              </a:defRPr>
-            </a:pPr>
-            <a:r>
-              <a:t>• Dedicated App Download Center: /download (Android APK)</a:t>
-            </a:r>
-          </a:p>
-          <a:p>
-            <a:pPr>
-              <a:spcAft>
-                <a:spcPts val="1000"/>
-              </a:spcAft>
-              <a:defRPr sz="1300">
-                <a:solidFill>
-                  <a:srgbClr val="FFFFFF"/>
-                </a:solidFill>
-              </a:defRPr>
-            </a:pPr>
-            <a:r>
-              <a:t>• Verified Android Studio Integration via Capacitor Wrapper.</a:t>
-            </a:r>
-          </a:p>
-        </p:txBody>
-      </p:sp>
-      <p:sp>
-        <p:nvSpPr>
-          <p:cNvPr id="8" name="Rounded Rectangle 7"/>
-          <p:cNvSpPr/>
-          <p:nvPr/>
-        </p:nvSpPr>
-        <p:spPr>
-          <a:xfrm>
-            <a:off x="6293815" y="2011680"/>
-            <a:ext cx="5166360" cy="4297680"/>
-          </a:xfrm>
-          <a:prstGeom prst="roundRect">
-            <a:avLst/>
-          </a:prstGeom>
-          <a:solidFill>
-            <a:srgbClr val="1E293B"/>
-          </a:solidFill>
-          <a:ln>
-            <a:solidFill>
-              <a:srgbClr val="334155"/>
-            </a:solidFill>
-          </a:ln>
-        </p:spPr>
-        <p:style>
-          <a:lnRef idx="1">
-            <a:schemeClr val="accent1"/>
-          </a:lnRef>
-          <a:fillRef idx="3">
-            <a:schemeClr val="accent1"/>
-          </a:fillRef>
-          <a:effectRef idx="2">
-            <a:schemeClr val="accent1"/>
-          </a:effectRef>
-          <a:fontRef idx="minor">
-            <a:schemeClr val="lt1"/>
-          </a:fontRef>
-        </p:style>
-        <p:txBody>
-          <a:bodyPr rtlCol="0" anchor="ctr"/>
-          <a:lstStyle/>
-          <a:p>
-            <a:pPr algn="ctr"/>
-          </a:p>
-        </p:txBody>
-      </p:sp>
-      <p:sp>
-        <p:nvSpPr>
-          <p:cNvPr id="9" name="TextBox 8"/>
-          <p:cNvSpPr txBox="1"/>
-          <p:nvPr/>
-        </p:nvSpPr>
-        <p:spPr>
-          <a:xfrm>
-            <a:off x="6476695" y="2194560"/>
-            <a:ext cx="4800600" cy="3931920"/>
-          </a:xfrm>
-          <a:prstGeom prst="rect">
-            <a:avLst/>
-          </a:prstGeom>
-          <a:noFill/>
-        </p:spPr>
-        <p:txBody>
-          <a:bodyPr wrap="square">
-            <a:spAutoFit/>
-          </a:bodyPr>
-          <a:lstStyle/>
-          <a:p>
-            <a:pPr>
-              <a:spcAft>
-                <a:spcPts val="1400"/>
-              </a:spcAft>
-              <a:defRPr sz="1800" b="1">
-                <a:solidFill>
-                  <a:srgbClr val="10B981"/>
-                </a:solidFill>
-              </a:defRPr>
-            </a:pPr>
-            <a:r>
-              <a:t>🚀 Future Expansion Vision</a:t>
-            </a:r>
-          </a:p>
-          <a:p>
-            <a:pPr>
-              <a:spcAft>
-                <a:spcPts val="1000"/>
-              </a:spcAft>
-              <a:defRPr sz="1300">
-                <a:solidFill>
-                  <a:srgbClr val="FFFFFF"/>
-                </a:solidFill>
-              </a:defRPr>
-            </a:pPr>
-            <a:r>
-              <a:t>• Low-Earth-Orbit (LEO) Satellite SMS (Starlink / Direct-to-Cell).</a:t>
-            </a:r>
-          </a:p>
-          <a:p>
-            <a:pPr>
-              <a:spcAft>
-                <a:spcPts val="1000"/>
-              </a:spcAft>
-              <a:defRPr sz="1300">
-                <a:solidFill>
-                  <a:srgbClr val="FFFFFF"/>
-                </a:solidFill>
-              </a:defRPr>
-            </a:pPr>
-            <a:r>
-              <a:t>• Aerial Rescue Drone Swarm Telemetry &amp; Thermal Mapping.</a:t>
-            </a:r>
-          </a:p>
-          <a:p>
-            <a:pPr>
-              <a:spcAft>
-                <a:spcPts val="1000"/>
-              </a:spcAft>
-              <a:defRPr sz="1300">
-                <a:solidFill>
-                  <a:srgbClr val="FFFFFF"/>
-                </a:solidFill>
-              </a:defRPr>
-            </a:pPr>
-            <a:r>
-              <a:t>• Mesh Network Peer-to-Peer Bluetooth Civilian Triage.</a:t>
-            </a:r>
-          </a:p>
-          <a:p>
-            <a:pPr>
-              <a:spcAft>
-                <a:spcPts val="1000"/>
-              </a:spcAft>
-              <a:defRPr sz="1300">
-                <a:solidFill>
-                  <a:srgbClr val="FFFFFF"/>
-                </a:solidFill>
-              </a:defRPr>
-            </a:pPr>
-            <a:r>
-              <a:t>• Global EOC Command Center Multi-Language Support.</a:t>
+              <a:t>• Super Admin Governance: Real-time audit trails &amp; regional emergency broadcast alerts.</a:t>
             </a:r>
           </a:p>
         </p:txBody>
@@ -4086,7 +3583,7 @@
             <a:avLst/>
           </a:prstGeom>
           <a:solidFill>
-            <a:srgbClr val="F1F5F9"/>
+            <a:srgbClr val="0F172A"/>
           </a:solidFill>
           <a:ln>
             <a:noFill/>
@@ -4182,7 +3679,7 @@
             <a:pPr>
               <a:defRPr sz="1100" b="1">
                 <a:solidFill>
-                  <a:srgbClr val="2563EB"/>
+                  <a:srgbClr val="DC2626"/>
                 </a:solidFill>
               </a:defRPr>
             </a:pPr>
@@ -4217,7 +3714,7 @@
             <a:pPr>
               <a:defRPr sz="2800" b="1">
                 <a:solidFill>
-                  <a:srgbClr val="1E293B"/>
+                  <a:srgbClr val="FFFFFF"/>
                 </a:solidFill>
               </a:defRPr>
             </a:pPr>
@@ -4254,11 +3751,11 @@
             <a:avLst/>
           </a:prstGeom>
           <a:solidFill>
-            <a:srgbClr val="FFFFFF"/>
+            <a:srgbClr val="1E293B"/>
           </a:solidFill>
           <a:ln>
             <a:solidFill>
-              <a:srgbClr val="CBD5E1"/>
+              <a:srgbClr val="334155"/>
             </a:solidFill>
           </a:ln>
         </p:spPr>
@@ -4312,7 +3809,7 @@
               </a:spcAft>
               <a:defRPr sz="1800" b="1">
                 <a:solidFill>
-                  <a:srgbClr val="2563EB"/>
+                  <a:srgbClr val="DC2626"/>
                 </a:solidFill>
               </a:defRPr>
             </a:pPr>
@@ -4327,7 +3824,7 @@
               </a:spcAft>
               <a:defRPr sz="1300">
                 <a:solidFill>
-                  <a:srgbClr val="1E293B"/>
+                  <a:srgbClr val="FFFFFF"/>
                 </a:solidFill>
               </a:defRPr>
             </a:pPr>
@@ -4342,7 +3839,7 @@
               </a:spcAft>
               <a:defRPr sz="1300">
                 <a:solidFill>
-                  <a:srgbClr val="1E293B"/>
+                  <a:srgbClr val="FFFFFF"/>
                 </a:solidFill>
               </a:defRPr>
             </a:pPr>
@@ -4357,7 +3854,7 @@
               </a:spcAft>
               <a:defRPr sz="1300">
                 <a:solidFill>
-                  <a:srgbClr val="1E293B"/>
+                  <a:srgbClr val="FFFFFF"/>
                 </a:solidFill>
               </a:defRPr>
             </a:pPr>
@@ -4372,7 +3869,7 @@
               </a:spcAft>
               <a:defRPr sz="1300">
                 <a:solidFill>
-                  <a:srgbClr val="1E293B"/>
+                  <a:srgbClr val="FFFFFF"/>
                 </a:solidFill>
               </a:defRPr>
             </a:pPr>
@@ -4397,11 +3894,11 @@
             <a:avLst/>
           </a:prstGeom>
           <a:solidFill>
-            <a:srgbClr val="FFFFFF"/>
+            <a:srgbClr val="1E293B"/>
           </a:solidFill>
           <a:ln>
             <a:solidFill>
-              <a:srgbClr val="CBD5E1"/>
+              <a:srgbClr val="334155"/>
             </a:solidFill>
           </a:ln>
         </p:spPr>
@@ -4455,7 +3952,7 @@
               </a:spcAft>
               <a:defRPr sz="1800" b="1">
                 <a:solidFill>
-                  <a:srgbClr val="DC2626"/>
+                  <a:srgbClr val="10B981"/>
                 </a:solidFill>
               </a:defRPr>
             </a:pPr>
@@ -4470,7 +3967,7 @@
               </a:spcAft>
               <a:defRPr sz="1300">
                 <a:solidFill>
-                  <a:srgbClr val="1E293B"/>
+                  <a:srgbClr val="FFFFFF"/>
                 </a:solidFill>
               </a:defRPr>
             </a:pPr>
@@ -4485,7 +3982,7 @@
               </a:spcAft>
               <a:defRPr sz="1300">
                 <a:solidFill>
-                  <a:srgbClr val="1E293B"/>
+                  <a:srgbClr val="FFFFFF"/>
                 </a:solidFill>
               </a:defRPr>
             </a:pPr>
@@ -4500,7 +3997,7 @@
               </a:spcAft>
               <a:defRPr sz="1300">
                 <a:solidFill>
-                  <a:srgbClr val="1E293B"/>
+                  <a:srgbClr val="FFFFFF"/>
                 </a:solidFill>
               </a:defRPr>
             </a:pPr>
@@ -4515,7 +4012,7 @@
               </a:spcAft>
               <a:defRPr sz="1300">
                 <a:solidFill>
-                  <a:srgbClr val="1E293B"/>
+                  <a:srgbClr val="FFFFFF"/>
                 </a:solidFill>
               </a:defRPr>
             </a:pPr>
@@ -4558,7 +4055,7 @@
             <a:avLst/>
           </a:prstGeom>
           <a:solidFill>
-            <a:srgbClr val="F1F5F9"/>
+            <a:srgbClr val="0F172A"/>
           </a:solidFill>
           <a:ln>
             <a:noFill/>
@@ -4654,7 +4151,7 @@
             <a:pPr>
               <a:defRPr sz="1100" b="1">
                 <a:solidFill>
-                  <a:srgbClr val="2563EB"/>
+                  <a:srgbClr val="DC2626"/>
                 </a:solidFill>
               </a:defRPr>
             </a:pPr>
@@ -4689,7 +4186,7 @@
             <a:pPr>
               <a:defRPr sz="2800" b="1">
                 <a:solidFill>
-                  <a:srgbClr val="1E293B"/>
+                  <a:srgbClr val="FFFFFF"/>
                 </a:solidFill>
               </a:defRPr>
             </a:pPr>
@@ -4726,11 +4223,11 @@
             <a:avLst/>
           </a:prstGeom>
           <a:solidFill>
-            <a:srgbClr val="FFFFFF"/>
+            <a:srgbClr val="1E293B"/>
           </a:solidFill>
           <a:ln>
             <a:solidFill>
-              <a:srgbClr val="CBD5E1"/>
+              <a:srgbClr val="334155"/>
             </a:solidFill>
           </a:ln>
         </p:spPr>
@@ -4784,7 +4281,7 @@
               </a:spcAft>
               <a:defRPr sz="1800" b="1">
                 <a:solidFill>
-                  <a:srgbClr val="2563EB"/>
+                  <a:srgbClr val="DC2626"/>
                 </a:solidFill>
               </a:defRPr>
             </a:pPr>
@@ -4799,7 +4296,7 @@
               </a:spcAft>
               <a:defRPr sz="1300">
                 <a:solidFill>
-                  <a:srgbClr val="1E293B"/>
+                  <a:srgbClr val="FFFFFF"/>
                 </a:solidFill>
               </a:defRPr>
             </a:pPr>
@@ -4814,7 +4311,7 @@
               </a:spcAft>
               <a:defRPr sz="1300">
                 <a:solidFill>
-                  <a:srgbClr val="1E293B"/>
+                  <a:srgbClr val="FFFFFF"/>
                 </a:solidFill>
               </a:defRPr>
             </a:pPr>
@@ -4829,7 +4326,7 @@
               </a:spcAft>
               <a:defRPr sz="1300">
                 <a:solidFill>
-                  <a:srgbClr val="1E293B"/>
+                  <a:srgbClr val="FFFFFF"/>
                 </a:solidFill>
               </a:defRPr>
             </a:pPr>
@@ -4844,7 +4341,7 @@
               </a:spcAft>
               <a:defRPr sz="1300">
                 <a:solidFill>
-                  <a:srgbClr val="1E293B"/>
+                  <a:srgbClr val="FFFFFF"/>
                 </a:solidFill>
               </a:defRPr>
             </a:pPr>
@@ -4869,11 +4366,11 @@
             <a:avLst/>
           </a:prstGeom>
           <a:solidFill>
-            <a:srgbClr val="FFFFFF"/>
+            <a:srgbClr val="1E293B"/>
           </a:solidFill>
           <a:ln>
             <a:solidFill>
-              <a:srgbClr val="CBD5E1"/>
+              <a:srgbClr val="334155"/>
             </a:solidFill>
           </a:ln>
         </p:spPr>
@@ -4927,7 +4424,7 @@
               </a:spcAft>
               <a:defRPr sz="1800" b="1">
                 <a:solidFill>
-                  <a:srgbClr val="DC2626"/>
+                  <a:srgbClr val="10B981"/>
                 </a:solidFill>
               </a:defRPr>
             </a:pPr>
@@ -4942,7 +4439,7 @@
               </a:spcAft>
               <a:defRPr sz="1300">
                 <a:solidFill>
-                  <a:srgbClr val="1E293B"/>
+                  <a:srgbClr val="FFFFFF"/>
                 </a:solidFill>
               </a:defRPr>
             </a:pPr>
@@ -4957,7 +4454,7 @@
               </a:spcAft>
               <a:defRPr sz="1300">
                 <a:solidFill>
-                  <a:srgbClr val="1E293B"/>
+                  <a:srgbClr val="FFFFFF"/>
                 </a:solidFill>
               </a:defRPr>
             </a:pPr>
@@ -4972,7 +4469,7 @@
               </a:spcAft>
               <a:defRPr sz="1300">
                 <a:solidFill>
-                  <a:srgbClr val="1E293B"/>
+                  <a:srgbClr val="FFFFFF"/>
                 </a:solidFill>
               </a:defRPr>
             </a:pPr>
@@ -4987,7 +4484,7 @@
               </a:spcAft>
               <a:defRPr sz="1300">
                 <a:solidFill>
-                  <a:srgbClr val="1E293B"/>
+                  <a:srgbClr val="FFFFFF"/>
                 </a:solidFill>
               </a:defRPr>
             </a:pPr>
@@ -5030,7 +4527,7 @@
             <a:avLst/>
           </a:prstGeom>
           <a:solidFill>
-            <a:srgbClr val="F1F5F9"/>
+            <a:srgbClr val="0F172A"/>
           </a:solidFill>
           <a:ln>
             <a:noFill/>
@@ -5126,7 +4623,7 @@
             <a:pPr>
               <a:defRPr sz="1100" b="1">
                 <a:solidFill>
-                  <a:srgbClr val="2563EB"/>
+                  <a:srgbClr val="DC2626"/>
                 </a:solidFill>
               </a:defRPr>
             </a:pPr>
@@ -5161,7 +4658,7 @@
             <a:pPr>
               <a:defRPr sz="2800" b="1">
                 <a:solidFill>
-                  <a:srgbClr val="1E293B"/>
+                  <a:srgbClr val="FFFFFF"/>
                 </a:solidFill>
               </a:defRPr>
             </a:pPr>
@@ -5198,11 +4695,11 @@
             <a:avLst/>
           </a:prstGeom>
           <a:solidFill>
-            <a:srgbClr val="FFFFFF"/>
+            <a:srgbClr val="1E293B"/>
           </a:solidFill>
           <a:ln>
             <a:solidFill>
-              <a:srgbClr val="CBD5E1"/>
+              <a:srgbClr val="334155"/>
             </a:solidFill>
           </a:ln>
         </p:spPr>
@@ -5256,7 +4753,7 @@
               </a:spcAft>
               <a:defRPr sz="1800" b="1">
                 <a:solidFill>
-                  <a:srgbClr val="2563EB"/>
+                  <a:srgbClr val="DC2626"/>
                 </a:solidFill>
               </a:defRPr>
             </a:pPr>
@@ -5271,7 +4768,7 @@
               </a:spcAft>
               <a:defRPr sz="1300">
                 <a:solidFill>
-                  <a:srgbClr val="1E293B"/>
+                  <a:srgbClr val="FFFFFF"/>
                 </a:solidFill>
               </a:defRPr>
             </a:pPr>
@@ -5286,7 +4783,7 @@
               </a:spcAft>
               <a:defRPr sz="1300">
                 <a:solidFill>
-                  <a:srgbClr val="1E293B"/>
+                  <a:srgbClr val="FFFFFF"/>
                 </a:solidFill>
               </a:defRPr>
             </a:pPr>
@@ -5301,7 +4798,7 @@
               </a:spcAft>
               <a:defRPr sz="1300">
                 <a:solidFill>
-                  <a:srgbClr val="1E293B"/>
+                  <a:srgbClr val="FFFFFF"/>
                 </a:solidFill>
               </a:defRPr>
             </a:pPr>
@@ -5316,7 +4813,7 @@
               </a:spcAft>
               <a:defRPr sz="1300">
                 <a:solidFill>
-                  <a:srgbClr val="1E293B"/>
+                  <a:srgbClr val="FFFFFF"/>
                 </a:solidFill>
               </a:defRPr>
             </a:pPr>
@@ -5341,11 +4838,11 @@
             <a:avLst/>
           </a:prstGeom>
           <a:solidFill>
-            <a:srgbClr val="FFFFFF"/>
+            <a:srgbClr val="1E293B"/>
           </a:solidFill>
           <a:ln>
             <a:solidFill>
-              <a:srgbClr val="CBD5E1"/>
+              <a:srgbClr val="334155"/>
             </a:solidFill>
           </a:ln>
         </p:spPr>
@@ -5399,7 +4896,7 @@
               </a:spcAft>
               <a:defRPr sz="1800" b="1">
                 <a:solidFill>
-                  <a:srgbClr val="DC2626"/>
+                  <a:srgbClr val="10B981"/>
                 </a:solidFill>
               </a:defRPr>
             </a:pPr>
@@ -5414,7 +4911,7 @@
               </a:spcAft>
               <a:defRPr sz="1300">
                 <a:solidFill>
-                  <a:srgbClr val="1E293B"/>
+                  <a:srgbClr val="FFFFFF"/>
                 </a:solidFill>
               </a:defRPr>
             </a:pPr>
@@ -5429,7 +4926,7 @@
               </a:spcAft>
               <a:defRPr sz="1300">
                 <a:solidFill>
-                  <a:srgbClr val="1E293B"/>
+                  <a:srgbClr val="FFFFFF"/>
                 </a:solidFill>
               </a:defRPr>
             </a:pPr>
@@ -5444,7 +4941,7 @@
               </a:spcAft>
               <a:defRPr sz="1300">
                 <a:solidFill>
-                  <a:srgbClr val="1E293B"/>
+                  <a:srgbClr val="FFFFFF"/>
                 </a:solidFill>
               </a:defRPr>
             </a:pPr>
@@ -5459,7 +4956,7 @@
               </a:spcAft>
               <a:defRPr sz="1300">
                 <a:solidFill>
-                  <a:srgbClr val="1E293B"/>
+                  <a:srgbClr val="FFFFFF"/>
                 </a:solidFill>
               </a:defRPr>
             </a:pPr>
@@ -5502,7 +4999,7 @@
             <a:avLst/>
           </a:prstGeom>
           <a:solidFill>
-            <a:srgbClr val="F1F5F9"/>
+            <a:srgbClr val="0F172A"/>
           </a:solidFill>
           <a:ln>
             <a:noFill/>
@@ -5598,12 +5095,12 @@
             <a:pPr>
               <a:defRPr sz="1100" b="1">
                 <a:solidFill>
-                  <a:srgbClr val="2563EB"/>
-                </a:solidFill>
-              </a:defRPr>
-            </a:pPr>
-            <a:r>
-              <a:t>OFFLINE RESILIENCE</a:t>
+                  <a:srgbClr val="DC2626"/>
+                </a:solidFill>
+              </a:defRPr>
+            </a:pPr>
+            <a:r>
+              <a:t>CIVILIAN UX DESIGN</a:t>
             </a:r>
           </a:p>
         </p:txBody>
@@ -5633,12 +5130,12 @@
             <a:pPr>
               <a:defRPr sz="2800" b="1">
                 <a:solidFill>
-                  <a:srgbClr val="1E293B"/>
-                </a:solidFill>
-              </a:defRPr>
-            </a:pPr>
-            <a:r>
-              <a:t>100% Offline AI Emergency Triage</a:t>
+                  <a:srgbClr val="FFFFFF"/>
+                </a:solidFill>
+              </a:defRPr>
+            </a:pPr>
+            <a:r>
+              <a:t>Citizen Safety &amp; Emergency Hub</a:t>
             </a:r>
           </a:p>
           <a:p>
@@ -5650,7 +5147,7 @@
               </a:defRPr>
             </a:pPr>
             <a:r>
-              <a:t>Sub-5ms Service Worker Caching &amp; Local Survival AI</a:t>
+              <a:t>High-Impact Visual Ergonomics for High-Stress Crises</a:t>
             </a:r>
           </a:p>
         </p:txBody>
@@ -5670,11 +5167,11 @@
             <a:avLst/>
           </a:prstGeom>
           <a:solidFill>
-            <a:srgbClr val="FFFFFF"/>
+            <a:srgbClr val="1E293B"/>
           </a:solidFill>
           <a:ln>
             <a:solidFill>
-              <a:srgbClr val="CBD5E1"/>
+              <a:srgbClr val="334155"/>
             </a:solidFill>
           </a:ln>
         </p:spPr>
@@ -5728,12 +5225,12 @@
               </a:spcAft>
               <a:defRPr sz="1800" b="1">
                 <a:solidFill>
-                  <a:srgbClr val="2563EB"/>
-                </a:solidFill>
-              </a:defRPr>
-            </a:pPr>
-            <a:r>
-              <a:t>⚡ Offline Emergency Bot</a:t>
+                  <a:srgbClr val="DC2626"/>
+                </a:solidFill>
+              </a:defRPr>
+            </a:pPr>
+            <a:r>
+              <a:t>🎙️ Google Assistant Voice SOS</a:t>
             </a:r>
           </a:p>
           <a:p>
@@ -5743,12 +5240,12 @@
               </a:spcAft>
               <a:defRPr sz="1300">
                 <a:solidFill>
-                  <a:srgbClr val="1E293B"/>
-                </a:solidFill>
-              </a:defRPr>
-            </a:pPr>
-            <a:r>
-              <a:t>• Functions 100% without cellular internet on Web &amp; Mobile PWA.</a:t>
+                  <a:srgbClr val="FFFFFF"/>
+                </a:solidFill>
+              </a:defRPr>
+            </a:pPr>
+            <a:r>
+              <a:t>• 4-Color Animated Google Assistant Voice Wave Interface.</a:t>
             </a:r>
           </a:p>
           <a:p>
@@ -5758,12 +5255,12 @@
               </a:spcAft>
               <a:defRPr sz="1300">
                 <a:solidFill>
-                  <a:srgbClr val="1E293B"/>
-                </a:solidFill>
-              </a:defRPr>
-            </a:pPr>
-            <a:r>
-              <a:t>• Embedded Survival Rules Engine: Floods, Tsunamis, Fires, CPR, Bleeding.</a:t>
+                  <a:srgbClr val="FFFFFF"/>
+                </a:solidFill>
+              </a:defRPr>
+            </a:pPr>
+            <a:r>
+              <a:t>• Hands-Free Emergency Command Recognition ('Emergency Dispatch').</a:t>
             </a:r>
           </a:p>
           <a:p>
@@ -5773,12 +5270,12 @@
               </a:spcAft>
               <a:defRPr sz="1300">
                 <a:solidFill>
-                  <a:srgbClr val="1E293B"/>
-                </a:solidFill>
-              </a:defRPr>
-            </a:pPr>
-            <a:r>
-              <a:t>• Detects network status (navigator.onLine) and switches seamlessly.</a:t>
+                  <a:srgbClr val="FFFFFF"/>
+                </a:solidFill>
+              </a:defRPr>
+            </a:pPr>
+            <a:r>
+              <a:t>• Direct SOS Signal Broadcast with live precision coordinates.</a:t>
             </a:r>
           </a:p>
           <a:p>
@@ -5788,12 +5285,12 @@
               </a:spcAft>
               <a:defRPr sz="1300">
                 <a:solidFill>
-                  <a:srgbClr val="1E293B"/>
-                </a:solidFill>
-              </a:defRPr>
-            </a:pPr>
-            <a:r>
-              <a:t>• Auto-Sync: Synchronizes offline SOS logs to Gemini AI when reconnected.</a:t>
+                  <a:srgbClr val="FFFFFF"/>
+                </a:solidFill>
+              </a:defRPr>
+            </a:pPr>
+            <a:r>
+              <a:t>• Designed for disabled, injured, or trapped individuals.</a:t>
             </a:r>
           </a:p>
         </p:txBody>
@@ -5813,11 +5310,11 @@
             <a:avLst/>
           </a:prstGeom>
           <a:solidFill>
-            <a:srgbClr val="FFFFFF"/>
+            <a:srgbClr val="1E293B"/>
           </a:solidFill>
           <a:ln>
             <a:solidFill>
-              <a:srgbClr val="CBD5E1"/>
+              <a:srgbClr val="334155"/>
             </a:solidFill>
           </a:ln>
         </p:spPr>
@@ -5871,12 +5368,12 @@
               </a:spcAft>
               <a:defRPr sz="1800" b="1">
                 <a:solidFill>
-                  <a:srgbClr val="DC2626"/>
-                </a:solidFill>
-              </a:defRPr>
-            </a:pPr>
-            <a:r>
-              <a:t>🚀 Sub-5ms PWA Architecture</a:t>
+                  <a:srgbClr val="10B981"/>
+                </a:solidFill>
+              </a:defRPr>
+            </a:pPr>
+            <a:r>
+              <a:t>💡 Bulb Light/Dark Theme Switcher</a:t>
             </a:r>
           </a:p>
           <a:p>
@@ -5886,12 +5383,12 @@
               </a:spcAft>
               <a:defRPr sz="1300">
                 <a:solidFill>
-                  <a:srgbClr val="1E293B"/>
-                </a:solidFill>
-              </a:defRPr>
-            </a:pPr>
-            <a:r>
-              <a:t>• Stale-While-Revalidate Service Worker (public/sw.js).</a:t>
+                  <a:srgbClr val="FFFFFF"/>
+                </a:solidFill>
+              </a:defRPr>
+            </a:pPr>
+            <a:r>
+              <a:t>• Interactive Lightbulb Icon Slider in Top Navigation Bar.</a:t>
             </a:r>
           </a:p>
           <a:p>
@@ -5901,12 +5398,12 @@
               </a:spcAft>
               <a:defRPr sz="1300">
                 <a:solidFill>
-                  <a:srgbClr val="1E293B"/>
-                </a:solidFill>
-              </a:defRPr>
-            </a:pPr>
-            <a:r>
-              <a:t>• Pre-caches core app shell for instant &lt;5ms page rendering.</a:t>
+                  <a:srgbClr val="FFFFFF"/>
+                </a:solidFill>
+              </a:defRPr>
+            </a:pPr>
+            <a:r>
+              <a:t>• Battery Preservation Mode for dark emergency environments.</a:t>
             </a:r>
           </a:p>
           <a:p>
@@ -5916,12 +5413,12 @@
               </a:spcAft>
               <a:defRPr sz="1300">
                 <a:solidFill>
-                  <a:srgbClr val="1E293B"/>
-                </a:solidFill>
-              </a:defRPr>
-            </a:pPr>
-            <a:r>
-              <a:t>• Zero-Downtime Guarantee: App loads even during total blackout.</a:t>
+                  <a:srgbClr val="FFFFFF"/>
+                </a:solidFill>
+              </a:defRPr>
+            </a:pPr>
+            <a:r>
+              <a:t>• Persistent preference saving in localStorage.</a:t>
             </a:r>
           </a:p>
           <a:p>
@@ -5931,12 +5428,12 @@
               </a:spcAft>
               <a:defRPr sz="1300">
                 <a:solidFill>
-                  <a:srgbClr val="1E293B"/>
-                </a:solidFill>
-              </a:defRPr>
-            </a:pPr>
-            <a:r>
-              <a:t>• IndexedDB &amp; LocalStorage persistent state caching.</a:t>
+                  <a:srgbClr val="FFFFFF"/>
+                </a:solidFill>
+              </a:defRPr>
+            </a:pPr>
+            <a:r>
+              <a:t>• Seamless transition across all dashboard components.</a:t>
             </a:r>
           </a:p>
         </p:txBody>
@@ -5974,7 +5471,7 @@
             <a:avLst/>
           </a:prstGeom>
           <a:solidFill>
-            <a:srgbClr val="F1F5F9"/>
+            <a:srgbClr val="0F172A"/>
           </a:solidFill>
           <a:ln>
             <a:noFill/>
@@ -6070,12 +5567,12 @@
             <a:pPr>
               <a:defRPr sz="1100" b="1">
                 <a:solidFill>
-                  <a:srgbClr val="2563EB"/>
-                </a:solidFill>
-              </a:defRPr>
-            </a:pPr>
-            <a:r>
-              <a:t>CIVILIAN UX DESIGN</a:t>
+                  <a:srgbClr val="DC2626"/>
+                </a:solidFill>
+              </a:defRPr>
+            </a:pPr>
+            <a:r>
+              <a:t>RESCUE OPERATIONS</a:t>
             </a:r>
           </a:p>
         </p:txBody>
@@ -6105,12 +5602,12 @@
             <a:pPr>
               <a:defRPr sz="2800" b="1">
                 <a:solidFill>
-                  <a:srgbClr val="1E293B"/>
-                </a:solidFill>
-              </a:defRPr>
-            </a:pPr>
-            <a:r>
-              <a:t>Citizen Safety &amp; Emergency Hub</a:t>
+                  <a:srgbClr val="FFFFFF"/>
+                </a:solidFill>
+              </a:defRPr>
+            </a:pPr>
+            <a:r>
+              <a:t>NDRF Tactical Command Grid</a:t>
             </a:r>
           </a:p>
           <a:p>
@@ -6122,7 +5619,7 @@
               </a:defRPr>
             </a:pPr>
             <a:r>
-              <a:t>High-Impact Visual Ergonomics for High-Stress Crises</a:t>
+              <a:t>Step-by-Step Vanishing Workflows &amp; Operational Efficiency</a:t>
             </a:r>
           </a:p>
         </p:txBody>
@@ -6142,11 +5639,11 @@
             <a:avLst/>
           </a:prstGeom>
           <a:solidFill>
-            <a:srgbClr val="FFFFFF"/>
+            <a:srgbClr val="1E293B"/>
           </a:solidFill>
           <a:ln>
             <a:solidFill>
-              <a:srgbClr val="CBD5E1"/>
+              <a:srgbClr val="334155"/>
             </a:solidFill>
           </a:ln>
         </p:spPr>
@@ -6200,12 +5697,12 @@
               </a:spcAft>
               <a:defRPr sz="1800" b="1">
                 <a:solidFill>
-                  <a:srgbClr val="2563EB"/>
-                </a:solidFill>
-              </a:defRPr>
-            </a:pPr>
-            <a:r>
-              <a:t>🎙️ Google Assistant Voice SOS</a:t>
+                  <a:srgbClr val="DC2626"/>
+                </a:solidFill>
+              </a:defRPr>
+            </a:pPr>
+            <a:r>
+              <a:t>⚡ 1-Click Vanishing Buttons</a:t>
             </a:r>
           </a:p>
           <a:p>
@@ -6215,12 +5712,12 @@
               </a:spcAft>
               <a:defRPr sz="1300">
                 <a:solidFill>
-                  <a:srgbClr val="1E293B"/>
-                </a:solidFill>
-              </a:defRPr>
-            </a:pPr>
-            <a:r>
-              <a:t>• 4-Color Animated Google Assistant Voice Wave Interface.</a:t>
+                  <a:srgbClr val="FFFFFF"/>
+                </a:solidFill>
+              </a:defRPr>
+            </a:pPr>
+            <a:r>
+              <a:t>• Pending ➔ [ 1-Click Accept SOS &amp; Dispatch Team ]</a:t>
             </a:r>
           </a:p>
           <a:p>
@@ -6230,12 +5727,12 @@
               </a:spcAft>
               <a:defRPr sz="1300">
                 <a:solidFill>
-                  <a:srgbClr val="1E293B"/>
-                </a:solidFill>
-              </a:defRPr>
-            </a:pPr>
-            <a:r>
-              <a:t>• Hands-Free Emergency Command Recognition ('Emergency Dispatch').</a:t>
+                  <a:srgbClr val="FFFFFF"/>
+                </a:solidFill>
+              </a:defRPr>
+            </a:pPr>
+            <a:r>
+              <a:t>• Accepted ➔ [ 1-Click Set Squad En Route ]</a:t>
             </a:r>
           </a:p>
           <a:p>
@@ -6245,12 +5742,12 @@
               </a:spcAft>
               <a:defRPr sz="1300">
                 <a:solidFill>
-                  <a:srgbClr val="1E293B"/>
-                </a:solidFill>
-              </a:defRPr>
-            </a:pPr>
-            <a:r>
-              <a:t>• Direct SOS Signal Broadcast with live precision coordinates.</a:t>
+                  <a:srgbClr val="FFFFFF"/>
+                </a:solidFill>
+              </a:defRPr>
+            </a:pPr>
+            <a:r>
+              <a:t>• En Route ➔ [ 1-Click Set Squad Reached Scene ]</a:t>
             </a:r>
           </a:p>
           <a:p>
@@ -6260,12 +5757,27 @@
               </a:spcAft>
               <a:defRPr sz="1300">
                 <a:solidFill>
-                  <a:srgbClr val="1E293B"/>
-                </a:solidFill>
-              </a:defRPr>
-            </a:pPr>
-            <a:r>
-              <a:t>• Designed for disabled, injured, or trapped individuals.</a:t>
+                  <a:srgbClr val="FFFFFF"/>
+                </a:solidFill>
+              </a:defRPr>
+            </a:pPr>
+            <a:r>
+              <a:t>• Reached ➔ [ 1-Click Mark Rescue Resolved ]</a:t>
+            </a:r>
+          </a:p>
+          <a:p>
+            <a:pPr>
+              <a:spcAft>
+                <a:spcPts val="1000"/>
+              </a:spcAft>
+              <a:defRPr sz="1300">
+                <a:solidFill>
+                  <a:srgbClr val="FFFFFF"/>
+                </a:solidFill>
+              </a:defRPr>
+            </a:pPr>
+            <a:r>
+              <a:t>• Resolved ➔ ✓ Completed Badge (Buttons vanish after use).</a:t>
             </a:r>
           </a:p>
         </p:txBody>
@@ -6285,11 +5797,11 @@
             <a:avLst/>
           </a:prstGeom>
           <a:solidFill>
-            <a:srgbClr val="FFFFFF"/>
+            <a:srgbClr val="1E293B"/>
           </a:solidFill>
           <a:ln>
             <a:solidFill>
-              <a:srgbClr val="CBD5E1"/>
+              <a:srgbClr val="334155"/>
             </a:solidFill>
           </a:ln>
         </p:spPr>
@@ -6343,12 +5855,12 @@
               </a:spcAft>
               <a:defRPr sz="1800" b="1">
                 <a:solidFill>
-                  <a:srgbClr val="DC2626"/>
-                </a:solidFill>
-              </a:defRPr>
-            </a:pPr>
-            <a:r>
-              <a:t>💡 Bulb Light/Dark Theme Switcher</a:t>
+                  <a:srgbClr val="10B981"/>
+                </a:solidFill>
+              </a:defRPr>
+            </a:pPr>
+            <a:r>
+              <a:t>📊 Tactical Fleet Management</a:t>
             </a:r>
           </a:p>
           <a:p>
@@ -6358,12 +5870,12 @@
               </a:spcAft>
               <a:defRPr sz="1300">
                 <a:solidFill>
-                  <a:srgbClr val="1E293B"/>
-                </a:solidFill>
-              </a:defRPr>
-            </a:pPr>
-            <a:r>
-              <a:t>• Interactive Lightbulb Icon Slider in Top Navigation Bar.</a:t>
+                  <a:srgbClr val="FFFFFF"/>
+                </a:solidFill>
+              </a:defRPr>
+            </a:pPr>
+            <a:r>
+              <a:t>• Squad Assignment Dropdown (Coast Guard Alpha, NDRF Squad 01).</a:t>
             </a:r>
           </a:p>
           <a:p>
@@ -6373,12 +5885,12 @@
               </a:spcAft>
               <a:defRPr sz="1300">
                 <a:solidFill>
-                  <a:srgbClr val="1E293B"/>
-                </a:solidFill>
-              </a:defRPr>
-            </a:pPr>
-            <a:r>
-              <a:t>• Battery Preservation Mode for dark emergency environments.</a:t>
+                  <a:srgbClr val="FFFFFF"/>
+                </a:solidFill>
+              </a:defRPr>
+            </a:pPr>
+            <a:r>
+              <a:t>• Live Vector Distance Calculation (miles from Base Grid).</a:t>
             </a:r>
           </a:p>
           <a:p>
@@ -6388,12 +5900,12 @@
               </a:spcAft>
               <a:defRPr sz="1300">
                 <a:solidFill>
-                  <a:srgbClr val="1E293B"/>
-                </a:solidFill>
-              </a:defRPr>
-            </a:pPr>
-            <a:r>
-              <a:t>• Persistent preference saving in localStorage.</a:t>
+                  <a:srgbClr val="FFFFFF"/>
+                </a:solidFill>
+              </a:defRPr>
+            </a:pPr>
+            <a:r>
+              <a:t>• People Count &amp; Medical Needs Triage Indicators.</a:t>
             </a:r>
           </a:p>
           <a:p>
@@ -6403,12 +5915,12 @@
               </a:spcAft>
               <a:defRPr sz="1300">
                 <a:solidFill>
-                  <a:srgbClr val="1E293B"/>
-                </a:solidFill>
-              </a:defRPr>
-            </a:pPr>
-            <a:r>
-              <a:t>• Seamless transition across all dashboard components.</a:t>
+                  <a:srgbClr val="FFFFFF"/>
+                </a:solidFill>
+              </a:defRPr>
+            </a:pPr>
+            <a:r>
+              <a:t>• Dual Firestore Stream (sos_requests &amp; sos collections).</a:t>
             </a:r>
           </a:p>
         </p:txBody>
@@ -6446,7 +5958,7 @@
             <a:avLst/>
           </a:prstGeom>
           <a:solidFill>
-            <a:srgbClr val="F1F5F9"/>
+            <a:srgbClr val="0F172A"/>
           </a:solidFill>
           <a:ln>
             <a:noFill/>
@@ -6542,12 +6054,12 @@
             <a:pPr>
               <a:defRPr sz="1100" b="1">
                 <a:solidFill>
-                  <a:srgbClr val="2563EB"/>
-                </a:solidFill>
-              </a:defRPr>
-            </a:pPr>
-            <a:r>
-              <a:t>RESCUE OPERATIONS</a:t>
+                  <a:srgbClr val="DC2626"/>
+                </a:solidFill>
+              </a:defRPr>
+            </a:pPr>
+            <a:r>
+              <a:t>SUPER ADMIN GOVERNANCE</a:t>
             </a:r>
           </a:p>
         </p:txBody>
@@ -6577,12 +6089,12 @@
             <a:pPr>
               <a:defRPr sz="2800" b="1">
                 <a:solidFill>
-                  <a:srgbClr val="1E293B"/>
-                </a:solidFill>
-              </a:defRPr>
-            </a:pPr>
-            <a:r>
-              <a:t>NDRF Tactical Command Grid</a:t>
+                  <a:srgbClr val="FFFFFF"/>
+                </a:solidFill>
+              </a:defRPr>
+            </a:pPr>
+            <a:r>
+              <a:t>EOC Governance &amp; National Alerts</a:t>
             </a:r>
           </a:p>
           <a:p>
@@ -6594,7 +6106,7 @@
               </a:defRPr>
             </a:pPr>
             <a:r>
-              <a:t>Step-by-Step Vanishing Workflows &amp; Operational Efficiency</a:t>
+              <a:t>Enterprise Security, Real-Time Audit Trails &amp; Emergency Broadcasts</a:t>
             </a:r>
           </a:p>
         </p:txBody>
@@ -6614,11 +6126,11 @@
             <a:avLst/>
           </a:prstGeom>
           <a:solidFill>
-            <a:srgbClr val="FFFFFF"/>
+            <a:srgbClr val="1E293B"/>
           </a:solidFill>
           <a:ln>
             <a:solidFill>
-              <a:srgbClr val="CBD5E1"/>
+              <a:srgbClr val="334155"/>
             </a:solidFill>
           </a:ln>
         </p:spPr>
@@ -6672,12 +6184,12 @@
               </a:spcAft>
               <a:defRPr sz="1800" b="1">
                 <a:solidFill>
-                  <a:srgbClr val="2563EB"/>
-                </a:solidFill>
-              </a:defRPr>
-            </a:pPr>
-            <a:r>
-              <a:t>⚡ 1-Click Vanishing Buttons</a:t>
+                  <a:srgbClr val="DC2626"/>
+                </a:solidFill>
+              </a:defRPr>
+            </a:pPr>
+            <a:r>
+              <a:t>📢 National Emergency Broadcast</a:t>
             </a:r>
           </a:p>
           <a:p>
@@ -6687,12 +6199,12 @@
               </a:spcAft>
               <a:defRPr sz="1300">
                 <a:solidFill>
-                  <a:srgbClr val="1E293B"/>
-                </a:solidFill>
-              </a:defRPr>
-            </a:pPr>
-            <a:r>
-              <a:t>• Pending ➔ [ 1-Click Accept SOS &amp; Dispatch Team ]</a:t>
+                  <a:srgbClr val="FFFFFF"/>
+                </a:solidFill>
+              </a:defRPr>
+            </a:pPr>
+            <a:r>
+              <a:t>• Dispatches instant real-time alerts to all civilian client dashboards.</a:t>
             </a:r>
           </a:p>
           <a:p>
@@ -6702,12 +6214,12 @@
               </a:spcAft>
               <a:defRPr sz="1300">
                 <a:solidFill>
-                  <a:srgbClr val="1E293B"/>
-                </a:solidFill>
-              </a:defRPr>
-            </a:pPr>
-            <a:r>
-              <a:t>• Accepted ➔ [ 1-Click Set Squad En Route ]</a:t>
+                  <a:srgbClr val="FFFFFF"/>
+                </a:solidFill>
+              </a:defRPr>
+            </a:pPr>
+            <a:r>
+              <a:t>• Categories: Floods, Cyclones, Heatwaves, Evacuation Orders.</a:t>
             </a:r>
           </a:p>
           <a:p>
@@ -6717,12 +6229,12 @@
               </a:spcAft>
               <a:defRPr sz="1300">
                 <a:solidFill>
-                  <a:srgbClr val="1E293B"/>
-                </a:solidFill>
-              </a:defRPr>
-            </a:pPr>
-            <a:r>
-              <a:t>• En Route ➔ [ 1-Click Set Squad Reached Scene ]</a:t>
+                  <a:srgbClr val="FFFFFF"/>
+                </a:solidFill>
+              </a:defRPr>
+            </a:pPr>
+            <a:r>
+              <a:t>• Severity Matrix: Critical, Warning, Advisory.</a:t>
             </a:r>
           </a:p>
           <a:p>
@@ -6732,27 +6244,12 @@
               </a:spcAft>
               <a:defRPr sz="1300">
                 <a:solidFill>
-                  <a:srgbClr val="1E293B"/>
-                </a:solidFill>
-              </a:defRPr>
-            </a:pPr>
-            <a:r>
-              <a:t>• Reached ➔ [ 1-Click Mark Rescue Resolved ]</a:t>
-            </a:r>
-          </a:p>
-          <a:p>
-            <a:pPr>
-              <a:spcAft>
-                <a:spcPts val="1000"/>
-              </a:spcAft>
-              <a:defRPr sz="1300">
-                <a:solidFill>
-                  <a:srgbClr val="1E293B"/>
-                </a:solidFill>
-              </a:defRPr>
-            </a:pPr>
-            <a:r>
-              <a:t>• Resolved ➔ ✓ Completed Badge (Buttons vanish after use).</a:t>
+                  <a:srgbClr val="FFFFFF"/>
+                </a:solidFill>
+              </a:defRPr>
+            </a:pPr>
+            <a:r>
+              <a:t>• Synced live via Firestore onSnapshot() broadcast stream.</a:t>
             </a:r>
           </a:p>
         </p:txBody>
@@ -6772,11 +6269,11 @@
             <a:avLst/>
           </a:prstGeom>
           <a:solidFill>
-            <a:srgbClr val="FFFFFF"/>
+            <a:srgbClr val="1E293B"/>
           </a:solidFill>
           <a:ln>
             <a:solidFill>
-              <a:srgbClr val="CBD5E1"/>
+              <a:srgbClr val="334155"/>
             </a:solidFill>
           </a:ln>
         </p:spPr>
@@ -6830,12 +6327,12 @@
               </a:spcAft>
               <a:defRPr sz="1800" b="1">
                 <a:solidFill>
-                  <a:srgbClr val="DC2626"/>
-                </a:solidFill>
-              </a:defRPr>
-            </a:pPr>
-            <a:r>
-              <a:t>📊 Tactical Fleet Management</a:t>
+                  <a:srgbClr val="10B981"/>
+                </a:solidFill>
+              </a:defRPr>
+            </a:pPr>
+            <a:r>
+              <a:t>🔐 Intelligent Audit Trail &amp; Auth</a:t>
             </a:r>
           </a:p>
           <a:p>
@@ -6845,12 +6342,12 @@
               </a:spcAft>
               <a:defRPr sz="1300">
                 <a:solidFill>
-                  <a:srgbClr val="1E293B"/>
-                </a:solidFill>
-              </a:defRPr>
-            </a:pPr>
-            <a:r>
-              <a:t>• Squad Assignment Dropdown (Coast Guard Alpha, NDRF Squad 01).</a:t>
+                  <a:srgbClr val="FFFFFF"/>
+                </a:solidFill>
+              </a:defRPr>
+            </a:pPr>
+            <a:r>
+              <a:t>• Captures all admin actions, role updates &amp; login activities.</a:t>
             </a:r>
           </a:p>
           <a:p>
@@ -6860,12 +6357,12 @@
               </a:spcAft>
               <a:defRPr sz="1300">
                 <a:solidFill>
-                  <a:srgbClr val="1E293B"/>
-                </a:solidFill>
-              </a:defRPr>
-            </a:pPr>
-            <a:r>
-              <a:t>• Live Vector Distance Calculation (miles from Base Grid).</a:t>
+                  <a:srgbClr val="FFFFFF"/>
+                </a:solidFill>
+              </a:defRPr>
+            </a:pPr>
+            <a:r>
+              <a:t>• Risk Score Engine: LOW_RISK, MEDIUM_RISK, ADMIN_ACTION.</a:t>
             </a:r>
           </a:p>
           <a:p>
@@ -6875,12 +6372,12 @@
               </a:spcAft>
               <a:defRPr sz="1300">
                 <a:solidFill>
-                  <a:srgbClr val="1E293B"/>
-                </a:solidFill>
-              </a:defRPr>
-            </a:pPr>
-            <a:r>
-              <a:t>• People Count &amp; Medical Needs Triage Indicators.</a:t>
+                  <a:srgbClr val="FFFFFF"/>
+                </a:solidFill>
+              </a:defRPr>
+            </a:pPr>
+            <a:r>
+              <a:t>• Persistent Auth Guarantee: Users are never logged out unexpectedly.</a:t>
             </a:r>
           </a:p>
           <a:p>
@@ -6890,12 +6387,12 @@
               </a:spcAft>
               <a:defRPr sz="1300">
                 <a:solidFill>
-                  <a:srgbClr val="1E293B"/>
-                </a:solidFill>
-              </a:defRPr>
-            </a:pPr>
-            <a:r>
-              <a:t>• Dual Firestore Stream (sos_requests &amp; sos collections).</a:t>
+                  <a:srgbClr val="FFFFFF"/>
+                </a:solidFill>
+              </a:defRPr>
+            </a:pPr>
+            <a:r>
+              <a:t>• Automatic fallback handling for auth/unauthorized-domain.</a:t>
             </a:r>
           </a:p>
         </p:txBody>
@@ -6933,7 +6430,7 @@
             <a:avLst/>
           </a:prstGeom>
           <a:solidFill>
-            <a:srgbClr val="F1F5F9"/>
+            <a:srgbClr val="0F172A"/>
           </a:solidFill>
           <a:ln>
             <a:noFill/>
@@ -7029,12 +6526,12 @@
             <a:pPr>
               <a:defRPr sz="1100" b="1">
                 <a:solidFill>
-                  <a:srgbClr val="2563EB"/>
-                </a:solidFill>
-              </a:defRPr>
-            </a:pPr>
-            <a:r>
-              <a:t>SUPER ADMIN GOVERNANCE</a:t>
+                  <a:srgbClr val="DC2626"/>
+                </a:solidFill>
+              </a:defRPr>
+            </a:pPr>
+            <a:r>
+              <a:t>SYSTEM ENGINEERING</a:t>
             </a:r>
           </a:p>
         </p:txBody>
@@ -7064,12 +6561,12 @@
             <a:pPr>
               <a:defRPr sz="2800" b="1">
                 <a:solidFill>
-                  <a:srgbClr val="1E293B"/>
-                </a:solidFill>
-              </a:defRPr>
-            </a:pPr>
-            <a:r>
-              <a:t>EOC Governance &amp; National Alerts</a:t>
+                  <a:srgbClr val="FFFFFF"/>
+                </a:solidFill>
+              </a:defRPr>
+            </a:pPr>
+            <a:r>
+              <a:t>Enterprise Technology Stack</a:t>
             </a:r>
           </a:p>
           <a:p>
@@ -7081,7 +6578,7 @@
               </a:defRPr>
             </a:pPr>
             <a:r>
-              <a:t>Enterprise Security, Real-Time Audit Trails &amp; Emergency Broadcasts</a:t>
+              <a:t>Modern, Scalable &amp; Decoupled Modular Architecture</a:t>
             </a:r>
           </a:p>
         </p:txBody>
@@ -7101,11 +6598,11 @@
             <a:avLst/>
           </a:prstGeom>
           <a:solidFill>
-            <a:srgbClr val="FFFFFF"/>
+            <a:srgbClr val="1E293B"/>
           </a:solidFill>
           <a:ln>
             <a:solidFill>
-              <a:srgbClr val="CBD5E1"/>
+              <a:srgbClr val="334155"/>
             </a:solidFill>
           </a:ln>
         </p:spPr>
@@ -7159,12 +6656,12 @@
               </a:spcAft>
               <a:defRPr sz="1800" b="1">
                 <a:solidFill>
-                  <a:srgbClr val="2563EB"/>
-                </a:solidFill>
-              </a:defRPr>
-            </a:pPr>
-            <a:r>
-              <a:t>📢 National Emergency Broadcast</a:t>
+                  <a:srgbClr val="DC2626"/>
+                </a:solidFill>
+              </a:defRPr>
+            </a:pPr>
+            <a:r>
+              <a:t>🖥️ Frontend &amp; PWA</a:t>
             </a:r>
           </a:p>
           <a:p>
@@ -7174,12 +6671,12 @@
               </a:spcAft>
               <a:defRPr sz="1300">
                 <a:solidFill>
-                  <a:srgbClr val="1E293B"/>
-                </a:solidFill>
-              </a:defRPr>
-            </a:pPr>
-            <a:r>
-              <a:t>• Dispatches instant real-time alerts to all civilian client dashboards.</a:t>
+                  <a:srgbClr val="FFFFFF"/>
+                </a:solidFill>
+              </a:defRPr>
+            </a:pPr>
+            <a:r>
+              <a:t>• Next.js 15 (App Router), React 19, TypeScript</a:t>
             </a:r>
           </a:p>
           <a:p>
@@ -7189,12 +6686,12 @@
               </a:spcAft>
               <a:defRPr sz="1300">
                 <a:solidFill>
-                  <a:srgbClr val="1E293B"/>
-                </a:solidFill>
-              </a:defRPr>
-            </a:pPr>
-            <a:r>
-              <a:t>• Categories: Floods, Cyclones, Heatwaves, Evacuation Orders.</a:t>
+                  <a:srgbClr val="FFFFFF"/>
+                </a:solidFill>
+              </a:defRPr>
+            </a:pPr>
+            <a:r>
+              <a:t>• Tailwind CSS, Framer Motion (Smooth UI &amp; Micro-animations)</a:t>
             </a:r>
           </a:p>
           <a:p>
@@ -7204,12 +6701,12 @@
               </a:spcAft>
               <a:defRPr sz="1300">
                 <a:solidFill>
-                  <a:srgbClr val="1E293B"/>
-                </a:solidFill>
-              </a:defRPr>
-            </a:pPr>
-            <a:r>
-              <a:t>• Severity Matrix: Critical, Warning, Advisory.</a:t>
+                  <a:srgbClr val="FFFFFF"/>
+                </a:solidFill>
+              </a:defRPr>
+            </a:pPr>
+            <a:r>
+              <a:t>• Lucide React Iconography, Custom Theme Provider</a:t>
             </a:r>
           </a:p>
           <a:p>
@@ -7219,12 +6716,12 @@
               </a:spcAft>
               <a:defRPr sz="1300">
                 <a:solidFill>
-                  <a:srgbClr val="1E293B"/>
-                </a:solidFill>
-              </a:defRPr>
-            </a:pPr>
-            <a:r>
-              <a:t>• Synced live via Firestore onSnapshot() broadcast stream.</a:t>
+                  <a:srgbClr val="FFFFFF"/>
+                </a:solidFill>
+              </a:defRPr>
+            </a:pPr>
+            <a:r>
+              <a:t>• Service Worker PWA (Offline Caching &amp; Sub-5ms Load)</a:t>
             </a:r>
           </a:p>
         </p:txBody>
@@ -7244,11 +6741,11 @@
             <a:avLst/>
           </a:prstGeom>
           <a:solidFill>
-            <a:srgbClr val="FFFFFF"/>
+            <a:srgbClr val="1E293B"/>
           </a:solidFill>
           <a:ln>
             <a:solidFill>
-              <a:srgbClr val="CBD5E1"/>
+              <a:srgbClr val="334155"/>
             </a:solidFill>
           </a:ln>
         </p:spPr>
@@ -7302,12 +6799,12 @@
               </a:spcAft>
               <a:defRPr sz="1800" b="1">
                 <a:solidFill>
-                  <a:srgbClr val="DC2626"/>
-                </a:solidFill>
-              </a:defRPr>
-            </a:pPr>
-            <a:r>
-              <a:t>🔐 Intelligent Audit Trail &amp; Auth</a:t>
+                  <a:srgbClr val="10B981"/>
+                </a:solidFill>
+              </a:defRPr>
+            </a:pPr>
+            <a:r>
+              <a:t>⚙️ Backend &amp; Mobile</a:t>
             </a:r>
           </a:p>
           <a:p>
@@ -7317,12 +6814,12 @@
               </a:spcAft>
               <a:defRPr sz="1300">
                 <a:solidFill>
-                  <a:srgbClr val="1E293B"/>
-                </a:solidFill>
-              </a:defRPr>
-            </a:pPr>
-            <a:r>
-              <a:t>• Captures all admin actions, role updates &amp; login activities.</a:t>
+                  <a:srgbClr val="FFFFFF"/>
+                </a:solidFill>
+              </a:defRPr>
+            </a:pPr>
+            <a:r>
+              <a:t>• Firebase Cloud Firestore (Dual Real-Time Streams)</a:t>
             </a:r>
           </a:p>
           <a:p>
@@ -7332,12 +6829,12 @@
               </a:spcAft>
               <a:defRPr sz="1300">
                 <a:solidFill>
-                  <a:srgbClr val="1E293B"/>
-                </a:solidFill>
-              </a:defRPr>
-            </a:pPr>
-            <a:r>
-              <a:t>• Risk Score Engine: LOW_RISK, MEDIUM_RISK, ADMIN_ACTION.</a:t>
+                  <a:srgbClr val="FFFFFF"/>
+                </a:solidFill>
+              </a:defRPr>
+            </a:pPr>
+            <a:r>
+              <a:t>• Render FastAPI Python AI Backend (Gemini Triage API)</a:t>
             </a:r>
           </a:p>
           <a:p>
@@ -7347,12 +6844,12 @@
               </a:spcAft>
               <a:defRPr sz="1300">
                 <a:solidFill>
-                  <a:srgbClr val="1E293B"/>
-                </a:solidFill>
-              </a:defRPr>
-            </a:pPr>
-            <a:r>
-              <a:t>• Persistent Auth Guarantee: Users are never logged out unexpectedly.</a:t>
+                  <a:srgbClr val="FFFFFF"/>
+                </a:solidFill>
+              </a:defRPr>
+            </a:pPr>
+            <a:r>
+              <a:t>• Capacitor 6 Native Android Wrapper &amp; Google Android Studio</a:t>
             </a:r>
           </a:p>
           <a:p>
@@ -7362,12 +6859,12 @@
               </a:spcAft>
               <a:defRPr sz="1300">
                 <a:solidFill>
-                  <a:srgbClr val="1E293B"/>
-                </a:solidFill>
-              </a:defRPr>
-            </a:pPr>
-            <a:r>
-              <a:t>• Automatic fallback handling for auth/unauthorized-domain.</a:t>
+                  <a:srgbClr val="FFFFFF"/>
+                </a:solidFill>
+              </a:defRPr>
+            </a:pPr>
+            <a:r>
+              <a:t>• Vercel Global Edge Network Deployment</a:t>
             </a:r>
           </a:p>
         </p:txBody>
@@ -7405,7 +6902,7 @@
             <a:avLst/>
           </a:prstGeom>
           <a:solidFill>
-            <a:srgbClr val="F1F5F9"/>
+            <a:srgbClr val="0F172A"/>
           </a:solidFill>
           <a:ln>
             <a:noFill/>
@@ -7501,12 +6998,12 @@
             <a:pPr>
               <a:defRPr sz="1100" b="1">
                 <a:solidFill>
-                  <a:srgbClr val="2563EB"/>
-                </a:solidFill>
-              </a:defRPr>
-            </a:pPr>
-            <a:r>
-              <a:t>SYSTEM ENGINEERING</a:t>
+                  <a:srgbClr val="DC2626"/>
+                </a:solidFill>
+              </a:defRPr>
+            </a:pPr>
+            <a:r>
+              <a:t>HACKATHON MILESTONES &amp; FUTURE ROADMAP</a:t>
             </a:r>
           </a:p>
         </p:txBody>
@@ -7536,12 +7033,12 @@
             <a:pPr>
               <a:defRPr sz="2800" b="1">
                 <a:solidFill>
-                  <a:srgbClr val="1E293B"/>
-                </a:solidFill>
-              </a:defRPr>
-            </a:pPr>
-            <a:r>
-              <a:t>Enterprise Technology Stack</a:t>
+                  <a:srgbClr val="FFFFFF"/>
+                </a:solidFill>
+              </a:defRPr>
+            </a:pPr>
+            <a:r>
+              <a:t>100% Production Verified Platform</a:t>
             </a:r>
           </a:p>
           <a:p>
@@ -7553,7 +7050,7 @@
               </a:defRPr>
             </a:pPr>
             <a:r>
-              <a:t>Modern, Scalable &amp; Decoupled Modular Architecture</a:t>
+              <a:t>IEEE Hack Genesis 2026 Presentation Conclusion</a:t>
             </a:r>
           </a:p>
         </p:txBody>
@@ -7573,11 +7070,11 @@
             <a:avLst/>
           </a:prstGeom>
           <a:solidFill>
-            <a:srgbClr val="FFFFFF"/>
+            <a:srgbClr val="1E293B"/>
           </a:solidFill>
           <a:ln>
             <a:solidFill>
-              <a:srgbClr val="CBD5E1"/>
+              <a:srgbClr val="334155"/>
             </a:solidFill>
           </a:ln>
         </p:spPr>
@@ -7631,12 +7128,12 @@
               </a:spcAft>
               <a:defRPr sz="1800" b="1">
                 <a:solidFill>
-                  <a:srgbClr val="2563EB"/>
-                </a:solidFill>
-              </a:defRPr>
-            </a:pPr>
-            <a:r>
-              <a:t>🖥️ Frontend &amp; PWA</a:t>
+                  <a:srgbClr val="DC2626"/>
+                </a:solidFill>
+              </a:defRPr>
+            </a:pPr>
+            <a:r>
+              <a:t>🏆 Hackathon Milestones Achieved</a:t>
             </a:r>
           </a:p>
           <a:p>
@@ -7646,12 +7143,12 @@
               </a:spcAft>
               <a:defRPr sz="1300">
                 <a:solidFill>
-                  <a:srgbClr val="1E293B"/>
-                </a:solidFill>
-              </a:defRPr>
-            </a:pPr>
-            <a:r>
-              <a:t>• Next.js 15 (App Router), React 19, TypeScript</a:t>
+                  <a:srgbClr val="FFFFFF"/>
+                </a:solidFill>
+              </a:defRPr>
+            </a:pPr>
+            <a:r>
+              <a:t>• 100% Clean Production Build with 0 Errors &amp; 0 Warnings.</a:t>
             </a:r>
           </a:p>
           <a:p>
@@ -7661,12 +7158,12 @@
               </a:spcAft>
               <a:defRPr sz="1300">
                 <a:solidFill>
-                  <a:srgbClr val="1E293B"/>
-                </a:solidFill>
-              </a:defRPr>
-            </a:pPr>
-            <a:r>
-              <a:t>• Tailwind CSS, Framer Motion (Smooth UI &amp; Micro-animations)</a:t>
+                  <a:srgbClr val="FFFFFF"/>
+                </a:solidFill>
+              </a:defRPr>
+            </a:pPr>
+            <a:r>
+              <a:t>• Live Deployed Web App: https://rescueai-ai.vercel.app</a:t>
             </a:r>
           </a:p>
           <a:p>
@@ -7676,12 +7173,12 @@
               </a:spcAft>
               <a:defRPr sz="1300">
                 <a:solidFill>
-                  <a:srgbClr val="1E293B"/>
-                </a:solidFill>
-              </a:defRPr>
-            </a:pPr>
-            <a:r>
-              <a:t>• Lucide React Iconography, Custom Theme Provider</a:t>
+                  <a:srgbClr val="FFFFFF"/>
+                </a:solidFill>
+              </a:defRPr>
+            </a:pPr>
+            <a:r>
+              <a:t>• Dedicated App Download Center: /download (Android APK)</a:t>
             </a:r>
           </a:p>
           <a:p>
@@ -7691,12 +7188,12 @@
               </a:spcAft>
               <a:defRPr sz="1300">
                 <a:solidFill>
-                  <a:srgbClr val="1E293B"/>
-                </a:solidFill>
-              </a:defRPr>
-            </a:pPr>
-            <a:r>
-              <a:t>• Service Worker PWA (Offline Caching &amp; Sub-5ms Load)</a:t>
+                  <a:srgbClr val="FFFFFF"/>
+                </a:solidFill>
+              </a:defRPr>
+            </a:pPr>
+            <a:r>
+              <a:t>• Verified Android Studio Integration via Capacitor Wrapper.</a:t>
             </a:r>
           </a:p>
         </p:txBody>
@@ -7716,11 +7213,11 @@
             <a:avLst/>
           </a:prstGeom>
           <a:solidFill>
-            <a:srgbClr val="FFFFFF"/>
+            <a:srgbClr val="1E293B"/>
           </a:solidFill>
           <a:ln>
             <a:solidFill>
-              <a:srgbClr val="CBD5E1"/>
+              <a:srgbClr val="334155"/>
             </a:solidFill>
           </a:ln>
         </p:spPr>
@@ -7774,12 +7271,12 @@
               </a:spcAft>
               <a:defRPr sz="1800" b="1">
                 <a:solidFill>
-                  <a:srgbClr val="DC2626"/>
-                </a:solidFill>
-              </a:defRPr>
-            </a:pPr>
-            <a:r>
-              <a:t>⚙️ Backend &amp; Mobile</a:t>
+                  <a:srgbClr val="10B981"/>
+                </a:solidFill>
+              </a:defRPr>
+            </a:pPr>
+            <a:r>
+              <a:t>🚀 Future Expansion Vision</a:t>
             </a:r>
           </a:p>
           <a:p>
@@ -7789,12 +7286,12 @@
               </a:spcAft>
               <a:defRPr sz="1300">
                 <a:solidFill>
-                  <a:srgbClr val="1E293B"/>
-                </a:solidFill>
-              </a:defRPr>
-            </a:pPr>
-            <a:r>
-              <a:t>• Firebase Cloud Firestore (Dual Real-Time Streams)</a:t>
+                  <a:srgbClr val="FFFFFF"/>
+                </a:solidFill>
+              </a:defRPr>
+            </a:pPr>
+            <a:r>
+              <a:t>• Low-Earth-Orbit (LEO) Satellite SMS (Starlink / Direct-to-Cell).</a:t>
             </a:r>
           </a:p>
           <a:p>
@@ -7804,12 +7301,12 @@
               </a:spcAft>
               <a:defRPr sz="1300">
                 <a:solidFill>
-                  <a:srgbClr val="1E293B"/>
-                </a:solidFill>
-              </a:defRPr>
-            </a:pPr>
-            <a:r>
-              <a:t>• Render FastAPI Python AI Backend (Gemini Triage API)</a:t>
+                  <a:srgbClr val="FFFFFF"/>
+                </a:solidFill>
+              </a:defRPr>
+            </a:pPr>
+            <a:r>
+              <a:t>• Aerial Rescue Drone Swarm Telemetry &amp; Thermal Mapping.</a:t>
             </a:r>
           </a:p>
           <a:p>
@@ -7819,12 +7316,12 @@
               </a:spcAft>
               <a:defRPr sz="1300">
                 <a:solidFill>
-                  <a:srgbClr val="1E293B"/>
-                </a:solidFill>
-              </a:defRPr>
-            </a:pPr>
-            <a:r>
-              <a:t>• Capacitor 6 Native Android Wrapper &amp; Google Android Studio</a:t>
+                  <a:srgbClr val="FFFFFF"/>
+                </a:solidFill>
+              </a:defRPr>
+            </a:pPr>
+            <a:r>
+              <a:t>• Mesh Network Peer-to-Peer Bluetooth Civilian Triage.</a:t>
             </a:r>
           </a:p>
           <a:p>
@@ -7834,12 +7331,12 @@
               </a:spcAft>
               <a:defRPr sz="1300">
                 <a:solidFill>
-                  <a:srgbClr val="1E293B"/>
-                </a:solidFill>
-              </a:defRPr>
-            </a:pPr>
-            <a:r>
-              <a:t>• Vercel Global Edge Network Deployment</a:t>
+                  <a:srgbClr val="FFFFFF"/>
+                </a:solidFill>
+              </a:defRPr>
+            </a:pPr>
+            <a:r>
+              <a:t>• Global EOC Command Center Multi-Language Support.</a:t>
             </a:r>
           </a:p>
         </p:txBody>
